--- a/aeza_umirhack_defense.pptx
+++ b/aeza_umirhack_defense.pptx
@@ -142,7 +142,7 @@
           </c:tx>
           <c:spPr>
             <a:solidFill>
-              <a:srgbClr val="F97415"/>
+              <a:srgbClr val="FF6B00"/>
             </a:solidFill>
           </c:spPr>
           <c:cat>
@@ -5004,7 +5004,7 @@
             <a:avLst/>
           </a:prstGeom>
           <a:solidFill>
-            <a:srgbClr val="F97415"/>
+            <a:srgbClr val="FF6B00"/>
           </a:solidFill>
           <a:ln>
             <a:noFill/>
@@ -5187,7 +5187,7 @@
             <a:r>
               <a:rPr sz="4400" b="1" i="0">
                 <a:solidFill>
-                  <a:srgbClr val="F97415"/>
+                  <a:srgbClr val="FF6B00"/>
                 </a:solidFill>
                 <a:latin typeface="Manrope"/>
                 <a:cs typeface="Manrope"/>
@@ -5855,7 +5855,7 @@
             <a:avLst/>
           </a:prstGeom>
           <a:solidFill>
-            <a:srgbClr val="F97415"/>
+            <a:srgbClr val="FF6B00"/>
           </a:solidFill>
           <a:ln>
             <a:noFill/>
@@ -6038,7 +6038,7 @@
             <a:r>
               <a:rPr sz="2500" b="1" i="0">
                 <a:solidFill>
-                  <a:srgbClr val="F97415"/>
+                  <a:srgbClr val="FF6B00"/>
                 </a:solidFill>
                 <a:latin typeface="Manrope SemiBold"/>
                 <a:cs typeface="Manrope SemiBold"/>
@@ -6062,7 +6062,7 @@
             <a:r>
               <a:rPr sz="2500" b="1" i="0">
                 <a:solidFill>
-                  <a:srgbClr val="F97415"/>
+                  <a:srgbClr val="FF6B00"/>
                 </a:solidFill>
                 <a:latin typeface="Manrope SemiBold"/>
                 <a:cs typeface="Manrope SemiBold"/>
@@ -7078,7 +7078,7 @@
             <a:r>
               <a:rPr sz="1050" b="1" i="0" spc="140">
                 <a:solidFill>
-                  <a:srgbClr val="B34A0A"/>
+                  <a:srgbClr val="B84A00"/>
                 </a:solidFill>
                 <a:latin typeface="Manrope"/>
                 <a:cs typeface="Manrope"/>
@@ -7950,7 +7950,7 @@
             <a:avLst/>
           </a:prstGeom>
           <a:solidFill>
-            <a:srgbClr val="B34A0A"/>
+            <a:srgbClr val="B84A00"/>
           </a:solidFill>
           <a:ln>
             <a:noFill/>
@@ -7994,7 +7994,7 @@
             <a:avLst/>
           </a:prstGeom>
           <a:solidFill>
-            <a:srgbClr val="B34A0A"/>
+            <a:srgbClr val="B84A00"/>
           </a:solidFill>
           <a:ln>
             <a:noFill/>
@@ -8410,7 +8410,7 @@
             <a:r>
               <a:rPr sz="2500" b="1" i="0">
                 <a:solidFill>
-                  <a:srgbClr val="B34A0A"/>
+                  <a:srgbClr val="B84A00"/>
                 </a:solidFill>
                 <a:latin typeface="Manrope"/>
                 <a:cs typeface="Manrope"/>
@@ -8548,7 +8548,7 @@
             <a:r>
               <a:rPr sz="2500" b="1" i="0">
                 <a:solidFill>
-                  <a:srgbClr val="B34A0A"/>
+                  <a:srgbClr val="B84A00"/>
                 </a:solidFill>
                 <a:latin typeface="Manrope"/>
                 <a:cs typeface="Manrope"/>
@@ -8686,7 +8686,7 @@
             <a:r>
               <a:rPr sz="2500" b="1" i="0">
                 <a:solidFill>
-                  <a:srgbClr val="B34A0A"/>
+                  <a:srgbClr val="B84A00"/>
                 </a:solidFill>
                 <a:latin typeface="Manrope"/>
                 <a:cs typeface="Manrope"/>
@@ -8824,7 +8824,7 @@
             <a:r>
               <a:rPr sz="2500" b="1" i="0">
                 <a:solidFill>
-                  <a:srgbClr val="B34A0A"/>
+                  <a:srgbClr val="B84A00"/>
                 </a:solidFill>
                 <a:latin typeface="Manrope"/>
                 <a:cs typeface="Manrope"/>
@@ -9071,7 +9071,7 @@
             <a:r>
               <a:rPr sz="1050" b="1" i="0" spc="140">
                 <a:solidFill>
-                  <a:srgbClr val="B34A0A"/>
+                  <a:srgbClr val="B84A00"/>
                 </a:solidFill>
                 <a:latin typeface="Manrope"/>
                 <a:cs typeface="Manrope"/>
@@ -9215,7 +9215,7 @@
             <a:avLst/>
           </a:prstGeom>
           <a:solidFill>
-            <a:srgbClr val="F97415"/>
+            <a:srgbClr val="FF6B00"/>
           </a:solidFill>
           <a:ln>
             <a:noFill/>
@@ -9398,7 +9398,7 @@
             <a:avLst/>
           </a:prstGeom>
           <a:solidFill>
-            <a:srgbClr val="F97415"/>
+            <a:srgbClr val="FF6B00"/>
           </a:solidFill>
           <a:ln>
             <a:noFill/>
@@ -9557,7 +9557,7 @@
             <a:avLst/>
           </a:prstGeom>
           <a:solidFill>
-            <a:srgbClr val="F97415"/>
+            <a:srgbClr val="FF6B00"/>
           </a:solidFill>
           <a:ln>
             <a:noFill/>
@@ -9716,7 +9716,7 @@
             <a:avLst/>
           </a:prstGeom>
           <a:solidFill>
-            <a:srgbClr val="F97415"/>
+            <a:srgbClr val="FF6B00"/>
           </a:solidFill>
           <a:ln>
             <a:noFill/>
@@ -9916,7 +9916,7 @@
         <p:spPr>
           <a:xfrm>
             <a:off x="626364" y="3012948"/>
-            <a:ext cx="6556248" cy="2029745"/>
+            <a:ext cx="6556248" cy="2418059"/>
           </a:xfrm>
           <a:prstGeom prst="rect">
             <a:avLst/>
@@ -9970,7 +9970,7 @@
         <p:spPr>
           <a:xfrm>
             <a:off x="658368" y="3044952"/>
-            <a:ext cx="6486932" cy="1965737"/>
+            <a:ext cx="6487678" cy="2354051"/>
           </a:xfrm>
           <a:prstGeom prst="rect">
             <a:avLst/>
@@ -9985,7 +9985,7 @@
         </p:nvSpPr>
         <p:spPr>
           <a:xfrm>
-            <a:off x="658368" y="5120417"/>
+            <a:off x="658368" y="5508731"/>
             <a:ext cx="6492240" cy="180848"/>
           </a:xfrm>
           <a:prstGeom prst="rect">
@@ -10080,7 +10080,7 @@
         <p:spPr>
           <a:xfrm>
             <a:off x="7392924" y="3012948"/>
-            <a:ext cx="4172407" cy="1137622"/>
+            <a:ext cx="4172407" cy="1346239"/>
           </a:xfrm>
           <a:prstGeom prst="rect">
             <a:avLst/>
@@ -10119,7 +10119,7 @@
       </p:sp>
       <p:pic>
         <p:nvPicPr>
-          <p:cNvPr id="24" name="Picture 23" descr="w_dash_metrics.png"/>
+          <p:cNvPr id="24" name="Picture 23" descr="w_dash_metrics6.png"/>
           <p:cNvPicPr>
             <a:picLocks noChangeAspect="1"/>
           </p:cNvPicPr>
@@ -10134,7 +10134,7 @@
         <p:spPr>
           <a:xfrm>
             <a:off x="7424928" y="3044952"/>
-            <a:ext cx="4108399" cy="1073609"/>
+            <a:ext cx="4093728" cy="1282231"/>
           </a:xfrm>
           <a:prstGeom prst="rect">
             <a:avLst/>
@@ -10149,8 +10149,8 @@
         </p:nvSpPr>
         <p:spPr>
           <a:xfrm>
-            <a:off x="7392924" y="4287730"/>
-            <a:ext cx="4172407" cy="1125993"/>
+            <a:off x="7392924" y="4496347"/>
+            <a:ext cx="4172407" cy="1297724"/>
           </a:xfrm>
           <a:prstGeom prst="rect">
             <a:avLst/>
@@ -10203,8 +10203,8 @@
         </p:blipFill>
         <p:spPr>
           <a:xfrm>
-            <a:off x="7424928" y="4319734"/>
-            <a:ext cx="4108399" cy="1061982"/>
+            <a:off x="7424928" y="4528351"/>
+            <a:ext cx="4101909" cy="1233716"/>
           </a:xfrm>
           <a:prstGeom prst="rect">
             <a:avLst/>
@@ -10219,7 +10219,7 @@
         </p:nvSpPr>
         <p:spPr>
           <a:xfrm>
-            <a:off x="7424928" y="5491447"/>
+            <a:off x="7424928" y="5871795"/>
             <a:ext cx="4108399" cy="343408"/>
           </a:xfrm>
           <a:prstGeom prst="rect">
@@ -10380,7 +10380,7 @@
             <a:r>
               <a:rPr sz="1050" b="1" i="0" spc="140">
                 <a:solidFill>
-                  <a:srgbClr val="B34A0A"/>
+                  <a:srgbClr val="B84A00"/>
                 </a:solidFill>
                 <a:latin typeface="Manrope"/>
                 <a:cs typeface="Manrope"/>
@@ -10666,7 +10666,7 @@
             </a:avLst>
           </a:prstGeom>
           <a:solidFill>
-            <a:srgbClr val="B34A0A"/>
+            <a:srgbClr val="B84A00"/>
           </a:solidFill>
           <a:ln>
             <a:noFill/>
@@ -10799,7 +10799,7 @@
             <a:r>
               <a:rPr sz="1400" b="1" i="0">
                 <a:solidFill>
-                  <a:srgbClr val="B34A0A"/>
+                  <a:srgbClr val="B84A00"/>
                 </a:solidFill>
                 <a:latin typeface="Manrope SemiBold"/>
                 <a:cs typeface="Manrope SemiBold"/>
@@ -11242,7 +11242,7 @@
         <p:spPr>
           <a:xfrm>
             <a:off x="4759452" y="2263140"/>
-            <a:ext cx="6805879" cy="303522"/>
+            <a:ext cx="6805879" cy="410011"/>
           </a:xfrm>
           <a:prstGeom prst="rect">
             <a:avLst/>
@@ -11296,7 +11296,7 @@
         <p:spPr>
           <a:xfrm>
             <a:off x="4791456" y="2295144"/>
-            <a:ext cx="6741871" cy="239513"/>
+            <a:ext cx="6671647" cy="346003"/>
           </a:xfrm>
           <a:prstGeom prst="rect">
             <a:avLst/>
@@ -11311,8 +11311,8 @@
         </p:nvSpPr>
         <p:spPr>
           <a:xfrm>
-            <a:off x="4759452" y="2612382"/>
-            <a:ext cx="3361791" cy="1024005"/>
+            <a:off x="4759452" y="2718871"/>
+            <a:ext cx="3361791" cy="1250858"/>
           </a:xfrm>
           <a:prstGeom prst="rect">
             <a:avLst/>
@@ -11365,8 +11365,8 @@
         </p:blipFill>
         <p:spPr>
           <a:xfrm>
-            <a:off x="4791456" y="2644386"/>
-            <a:ext cx="3297767" cy="959997"/>
+            <a:off x="4791456" y="2750875"/>
+            <a:ext cx="3297783" cy="1186839"/>
           </a:xfrm>
           <a:prstGeom prst="rect">
             <a:avLst/>
@@ -11381,8 +11381,8 @@
         </p:nvSpPr>
         <p:spPr>
           <a:xfrm>
-            <a:off x="8203539" y="2612382"/>
-            <a:ext cx="3361791" cy="1024005"/>
+            <a:off x="8203539" y="2718871"/>
+            <a:ext cx="3361791" cy="1250858"/>
           </a:xfrm>
           <a:prstGeom prst="rect">
             <a:avLst/>
@@ -11435,8 +11435,8 @@
         </p:blipFill>
         <p:spPr>
           <a:xfrm>
-            <a:off x="8235543" y="2644386"/>
-            <a:ext cx="3297767" cy="959997"/>
+            <a:off x="8235543" y="2750875"/>
+            <a:ext cx="3297783" cy="1186839"/>
           </a:xfrm>
           <a:prstGeom prst="rect">
             <a:avLst/>
@@ -11451,7 +11451,7 @@
         </p:nvSpPr>
         <p:spPr>
           <a:xfrm>
-            <a:off x="4791456" y="3842127"/>
+            <a:off x="4791456" y="4175469"/>
             <a:ext cx="6741871" cy="151003"/>
           </a:xfrm>
           <a:prstGeom prst="rect">
@@ -11498,8 +11498,8 @@
         </p:nvSpPr>
         <p:spPr>
           <a:xfrm>
-            <a:off x="4759452" y="4057011"/>
-            <a:ext cx="6805879" cy="1336059"/>
+            <a:off x="4759452" y="4390353"/>
+            <a:ext cx="6805879" cy="1513779"/>
           </a:xfrm>
           <a:prstGeom prst="rect">
             <a:avLst/>
@@ -11552,8 +11552,8 @@
         </p:blipFill>
         <p:spPr>
           <a:xfrm>
-            <a:off x="4791456" y="4089015"/>
-            <a:ext cx="6741871" cy="1272051"/>
+            <a:off x="4791456" y="4422357"/>
+            <a:ext cx="6697172" cy="1449771"/>
           </a:xfrm>
           <a:prstGeom prst="rect">
             <a:avLst/>
@@ -11568,7 +11568,7 @@
         </p:nvSpPr>
         <p:spPr>
           <a:xfrm>
-            <a:off x="4791456" y="5470794"/>
+            <a:off x="4791456" y="5981856"/>
             <a:ext cx="6741871" cy="364998"/>
           </a:xfrm>
           <a:prstGeom prst="rect">
@@ -11820,7 +11820,7 @@
             <a:r>
               <a:rPr sz="1050" b="1" i="0" spc="140">
                 <a:solidFill>
-                  <a:srgbClr val="B34A0A"/>
+                  <a:srgbClr val="B84A00"/>
                 </a:solidFill>
                 <a:latin typeface="Manrope"/>
                 <a:cs typeface="Manrope"/>
@@ -12537,7 +12537,7 @@
             <a:avLst/>
           </a:prstGeom>
           <a:solidFill>
-            <a:srgbClr val="B34A0A"/>
+            <a:srgbClr val="B84A00"/>
           </a:solidFill>
           <a:ln>
             <a:noFill/>
@@ -12921,7 +12921,7 @@
             <a:r>
               <a:rPr sz="1050" b="1" i="0" spc="140">
                 <a:solidFill>
-                  <a:srgbClr val="B34A0A"/>
+                  <a:srgbClr val="B84A00"/>
                 </a:solidFill>
                 <a:latin typeface="Manrope"/>
                 <a:cs typeface="Manrope"/>
@@ -13399,7 +13399,7 @@
             <a:r>
               <a:rPr sz="1350" b="1" i="0">
                 <a:solidFill>
-                  <a:srgbClr val="B34A0A"/>
+                  <a:srgbClr val="B84A00"/>
                 </a:solidFill>
                 <a:latin typeface="Manrope SemiBold"/>
                 <a:cs typeface="Manrope SemiBold"/>
@@ -13842,7 +13842,7 @@
         <p:spPr>
           <a:xfrm>
             <a:off x="4878323" y="3323844"/>
-            <a:ext cx="6687008" cy="1307592"/>
+            <a:ext cx="6687008" cy="1462829"/>
           </a:xfrm>
           <a:prstGeom prst="rect">
             <a:avLst/>
@@ -13896,7 +13896,7 @@
         <p:spPr>
           <a:xfrm>
             <a:off x="4910327" y="3355848"/>
-            <a:ext cx="6623000" cy="1210084"/>
+            <a:ext cx="6615883" cy="1398821"/>
           </a:xfrm>
           <a:prstGeom prst="rect">
             <a:avLst/>
@@ -14032,7 +14032,7 @@
             <a:r>
               <a:rPr sz="1600" b="1" i="0">
                 <a:solidFill>
-                  <a:srgbClr val="B34A0A"/>
+                  <a:srgbClr val="B84A00"/>
                 </a:solidFill>
                 <a:latin typeface="Manrope"/>
                 <a:cs typeface="Manrope"/>
@@ -14653,7 +14653,7 @@
             <a:r>
               <a:rPr sz="1050" b="1" i="0" spc="140">
                 <a:solidFill>
-                  <a:srgbClr val="B34A0A"/>
+                  <a:srgbClr val="B84A00"/>
                 </a:solidFill>
                 <a:latin typeface="Manrope"/>
                 <a:cs typeface="Manrope"/>
@@ -14843,7 +14843,7 @@
             <a:avLst/>
           </a:prstGeom>
           <a:solidFill>
-            <a:srgbClr val="B34A0A"/>
+            <a:srgbClr val="B84A00"/>
           </a:solidFill>
           <a:ln>
             <a:noFill/>
@@ -14908,7 +14908,7 @@
             <a:r>
               <a:rPr sz="1100" b="1">
                 <a:solidFill>
-                  <a:srgbClr val="B34A0A"/>
+                  <a:srgbClr val="B84A00"/>
                 </a:solidFill>
                 <a:latin typeface="Manrope"/>
                 <a:cs typeface="Manrope"/>
@@ -15013,7 +15013,7 @@
             <a:r>
               <a:rPr sz="950" b="1" i="0">
                 <a:solidFill>
-                  <a:srgbClr val="B34A0A"/>
+                  <a:srgbClr val="B84A00"/>
                 </a:solidFill>
                 <a:latin typeface="Manrope"/>
                 <a:cs typeface="Manrope"/>
@@ -15033,7 +15033,7 @@
         <p:spPr>
           <a:xfrm>
             <a:off x="626364" y="2921508"/>
-            <a:ext cx="5346039" cy="827594"/>
+            <a:ext cx="5346039" cy="1978550"/>
           </a:xfrm>
           <a:prstGeom prst="rect">
             <a:avLst/>
@@ -15087,7 +15087,7 @@
         <p:spPr>
           <a:xfrm>
             <a:off x="658368" y="2953512"/>
-            <a:ext cx="5282031" cy="763582"/>
+            <a:ext cx="5282031" cy="1900950"/>
           </a:xfrm>
           <a:prstGeom prst="rect">
             <a:avLst/>
@@ -15103,7 +15103,7 @@
         <p:spPr>
           <a:xfrm>
             <a:off x="6219291" y="2921508"/>
-            <a:ext cx="5346039" cy="827594"/>
+            <a:ext cx="5346039" cy="1978550"/>
           </a:xfrm>
           <a:prstGeom prst="rect">
             <a:avLst/>
@@ -15157,7 +15157,7 @@
         <p:spPr>
           <a:xfrm>
             <a:off x="6251295" y="2953512"/>
-            <a:ext cx="5282031" cy="763582"/>
+            <a:ext cx="5282031" cy="1900950"/>
           </a:xfrm>
           <a:prstGeom prst="rect">
             <a:avLst/>
@@ -15315,7 +15315,7 @@
             <a:r>
               <a:rPr sz="1500" b="1">
                 <a:solidFill>
-                  <a:srgbClr val="B34A0A"/>
+                  <a:srgbClr val="B84A00"/>
                 </a:solidFill>
                 <a:latin typeface="Manrope"/>
                 <a:cs typeface="Manrope"/>
@@ -15477,7 +15477,7 @@
             <a:r>
               <a:rPr sz="1500" b="1">
                 <a:solidFill>
-                  <a:srgbClr val="B34A0A"/>
+                  <a:srgbClr val="B84A00"/>
                 </a:solidFill>
                 <a:latin typeface="Manrope"/>
                 <a:cs typeface="Manrope"/>
@@ -15639,7 +15639,7 @@
             <a:r>
               <a:rPr sz="1500" b="1">
                 <a:solidFill>
-                  <a:srgbClr val="B34A0A"/>
+                  <a:srgbClr val="B84A00"/>
                 </a:solidFill>
                 <a:latin typeface="Manrope"/>
                 <a:cs typeface="Manrope"/>
@@ -15801,7 +15801,7 @@
             <a:r>
               <a:rPr sz="1500" b="1">
                 <a:solidFill>
-                  <a:srgbClr val="B34A0A"/>
+                  <a:srgbClr val="B84A00"/>
                 </a:solidFill>
                 <a:latin typeface="Manrope"/>
                 <a:cs typeface="Manrope"/>
@@ -15963,7 +15963,7 @@
             <a:r>
               <a:rPr sz="1500" b="1">
                 <a:solidFill>
-                  <a:srgbClr val="B34A0A"/>
+                  <a:srgbClr val="B84A00"/>
                 </a:solidFill>
                 <a:latin typeface="Manrope"/>
                 <a:cs typeface="Manrope"/>
@@ -16125,7 +16125,7 @@
             <a:r>
               <a:rPr sz="1500" b="1">
                 <a:solidFill>
-                  <a:srgbClr val="B34A0A"/>
+                  <a:srgbClr val="B84A00"/>
                 </a:solidFill>
                 <a:latin typeface="Manrope"/>
                 <a:cs typeface="Manrope"/>
@@ -16305,7 +16305,7 @@
             <a:r>
               <a:rPr sz="1050" b="1" i="0" spc="140">
                 <a:solidFill>
-                  <a:srgbClr val="B34A0A"/>
+                  <a:srgbClr val="B84A00"/>
                 </a:solidFill>
                 <a:latin typeface="Manrope"/>
                 <a:cs typeface="Manrope"/>
@@ -17303,7 +17303,7 @@
             <a:avLst/>
           </a:prstGeom>
           <a:solidFill>
-            <a:srgbClr val="B34A0A"/>
+            <a:srgbClr val="B84A00"/>
           </a:solidFill>
           <a:ln>
             <a:noFill/>
@@ -17639,7 +17639,7 @@
             <a:r>
               <a:rPr sz="1050" b="1" i="0" spc="140">
                 <a:solidFill>
-                  <a:srgbClr val="B34A0A"/>
+                  <a:srgbClr val="B84A00"/>
                 </a:solidFill>
                 <a:latin typeface="Manrope"/>
                 <a:cs typeface="Manrope"/>
@@ -18561,7 +18561,7 @@
             <a:avLst/>
           </a:prstGeom>
           <a:solidFill>
-            <a:srgbClr val="B34A0A"/>
+            <a:srgbClr val="B84A00"/>
           </a:solidFill>
           <a:ln>
             <a:noFill/>

--- a/aeza_umirhack_defense.pptx
+++ b/aeza_umirhack_defense.pptx
@@ -147,9 +147,9 @@
           </c:spPr>
           <c:cat>
             <c:strRef>
-              <c:f>Sheet1!$A$2:$A$8</c:f>
+              <c:f>Sheet1!$A$2:$A$6</c:f>
               <c:strCache>
-                <c:ptCount val="7"/>
+                <c:ptCount val="5"/>
                 <c:pt idx="0">
                   <c:v>Близость даты окончания · 3,0</c:v>
                 </c:pt>
@@ -160,26 +160,20 @@
                   <c:v>Автопродление отключено · 2,0</c:v>
                 </c:pt>
                 <c:pt idx="3">
-                  <c:v>Неуспешные продления · 2,0</c:v>
+                  <c:v>Недостаточно средств · 0,0</c:v>
                 </c:pt>
                 <c:pt idx="4">
-                  <c:v>Доля неуспешных продлений · 1,5</c:v>
-                </c:pt>
-                <c:pt idx="5">
-                  <c:v>Недостаточно средств · 2,0</c:v>
-                </c:pt>
-                <c:pt idx="6">
-                  <c:v>Услуга приостановлена · 2,0</c:v>
+                  <c:v>Услуга приостановлена · 0,0</c:v>
                 </c:pt>
               </c:strCache>
             </c:strRef>
           </c:cat>
           <c:val>
             <c:numRef>
-              <c:f>Sheet1!$B$2:$B$8</c:f>
+              <c:f>Sheet1!$B$2:$B$6</c:f>
               <c:numCache>
                 <c:formatCode>General</c:formatCode>
-                <c:ptCount val="7"/>
+                <c:ptCount val="5"/>
                 <c:pt idx="0">
                   <c:v>3.0</c:v>
                 </c:pt>
@@ -190,15 +184,9 @@
                   <c:v>2.0</c:v>
                 </c:pt>
                 <c:pt idx="3">
-                  <c:v>2.0</c:v>
+                  <c:v>0.0</c:v>
                 </c:pt>
                 <c:pt idx="4">
-                  <c:v>1.5</c:v>
-                </c:pt>
-                <c:pt idx="5">
-                  <c:v>0.0</c:v>
-                </c:pt>
-                <c:pt idx="6">
                   <c:v>0.0</c:v>
                 </c:pt>
               </c:numCache>
@@ -927,7 +915,7 @@
           </a:p>
           <a:p>
             <a:r>
-              <a:t>по 6 есть неуспешные продления и 6 услуг приостановлены. Каждый сигнал по</a:t>
+              <a:t>6 услуг приостановлены и 6 ждут продления. Каждый сигнал по</a:t>
             </a:r>
           </a:p>
           <a:p>
@@ -1064,7 +1052,12 @@
           </a:p>
           <a:p>
             <a:r>
-              <a:t>строку user-0010@example.test — верхняя, балл 73,3), справа сводные метрики и блок</a:t>
+              <a:t>строку user-0010@example.test — балл 71,4, верхняя группа риска), справа сводные</a:t>
+            </a:r>
+          </a:p>
+          <a:p>
+            <a:r>
+              <a:t>метрики и блок</a:t>
             </a:r>
           </a:p>
           <a:p>
@@ -1159,17 +1152,22 @@
           </a:p>
           <a:p>
             <a:r>
-              <a:t>«Открываем список клиентов — он уже отсортирован по риску. Верхняя строка:</a:t>
-            </a:r>
-          </a:p>
-          <a:p>
-            <a:r>
-              <a:t>клиент #10, балл 73,3 из 100, категория «высокий». Выбираем его не случайно —</a:t>
-            </a:r>
-          </a:p>
-          <a:p>
-            <a:r>
-              <a:t>это максимум по списку.</a:t>
+              <a:t>«Открываем список клиентов — он уже отсортирован по риску. Сверху двое с</a:t>
+            </a:r>
+          </a:p>
+          <a:p>
+            <a:r>
+              <a:t>одинаковым баллом 71,4: клиент #5 и клиент #10. Берём #10 — он показывает</a:t>
+            </a:r>
+          </a:p>
+          <a:p>
+            <a:r>
+              <a:t>то же правило клиентского балла на двух услугах сразу. Максимум по списку</a:t>
+            </a:r>
+          </a:p>
+          <a:p>
+            <a:r>
+              <a:t>именно 71,4, и ни один клиент не поднялся выше.</a:t>
             </a:r>
           </a:p>
           <a:p>
@@ -1189,12 +1187,12 @@
           </a:p>
           <a:p>
             <a:r>
-              <a:t>Причины: услуга просрочена на 35 дней, два продления из двух не выполнены,</a:t>
-            </a:r>
-          </a:p>
-          <a:p>
-            <a:r>
-              <a:t>автопродление выключено.»</a:t>
+              <a:t>Причины: услуга просрочена на 35 дней, ждёт продления, автопродление выключено.</a:t>
+            </a:r>
+          </a:p>
+          <a:p>
+            <a:r>
+              <a:t>Три причины — это ровно те три фактора, что дали вклад в балл.»</a:t>
             </a:r>
           </a:p>
           <a:p/>
@@ -1205,12 +1203,17 @@
           </a:p>
           <a:p>
             <a:r>
-              <a:t>Возможный вопрос: «Почему балл клиента 73,3, а не среднее по услугам?» —</a:t>
+              <a:t>Возможный вопрос: «Почему балл клиента 71,4, а не среднее по услугам?» —</a:t>
             </a:r>
           </a:p>
           <a:p>
             <a:r>
               <a:t>Правило продукта: балл клиента — максимум по услугам, пригодным для прогноза.</a:t>
+            </a:r>
+          </a:p>
+          <a:p>
+            <a:r>
+              <a:t>У #10 это видно наглядно: две услуги по 71,4 и одна 52,4 — берётся максимум.</a:t>
             </a:r>
           </a:p>
           <a:p>
@@ -1300,12 +1303,12 @@
           </a:p>
           <a:p>
             <a:r>
-              <a:t>сумму вес×значение, делить на сумму весов. По этой услуге сумма вкладов 11 из 15 —</a:t>
-            </a:r>
-          </a:p>
-          <a:p>
-            <a:r>
-              <a:t>отсюда 73,3.</a:t>
+              <a:t>сумму вес×значение, делить на сумму весов. По этой услуге сумма вкладов 7,5 из 10,5 —</a:t>
+            </a:r>
+          </a:p>
+          <a:p>
+            <a:r>
+              <a:t>отсюда 71,4.</a:t>
             </a:r>
           </a:p>
           <a:p>
@@ -1315,12 +1318,22 @@
           </a:p>
           <a:p>
             <a:r>
-              <a:t>автопродление и неуспешные продления — по 2,0.</a:t>
-            </a:r>
-          </a:p>
-          <a:p>
-            <a:r>
-              <a:t>Два фактора дали ноль: баланса хватает на продление, услуга не приостановлена.</a:t>
+              <a:t>автопродление отключено — 2,0.</a:t>
+            </a:r>
+          </a:p>
+          <a:p>
+            <a:r>
+              <a:t>Остальные четыре фактора дали ноль: баланса хватает на продление, услуга не</a:t>
+            </a:r>
+          </a:p>
+          <a:p>
+            <a:r>
+              <a:t>приостановлена, а попыток продления за 90 дней нет, поэтому доля неуспешных</a:t>
+            </a:r>
+          </a:p>
+          <a:p>
+            <a:r>
+              <a:t>не определена и в знаменатель не входит.</a:t>
             </a:r>
           </a:p>
           <a:p>
@@ -1431,7 +1444,7 @@
           </a:p>
           <a:p>
             <a:r>
-              <a:t>«Здесь важно не сложить несопоставимое. У клиента #10 балл высокий — 73,3,</a:t>
+              <a:t>«Здесь важно не сложить несопоставимое. У клиента #10 балл высокий — 71,4,</a:t>
             </a:r>
           </a:p>
           <a:p>
@@ -1582,12 +1595,17 @@
           </a:p>
           <a:p>
             <a:r>
-              <a:t>Смотрите, что произошло. Балл клиента #10: 73,3 → 81,0. Клиентов высокого риска:</a:t>
-            </a:r>
-          </a:p>
-          <a:p>
-            <a:r>
-              <a:t>2 → 3, среднего: 4 → 3. Выручка под риском: 5,74 → 7,48 €.</a:t>
+              <a:t>Смотрите, что произошло. Балл клиента #10: 71,4 → 81,8. Услуг высокого риска:</a:t>
+            </a:r>
+          </a:p>
+          <a:p>
+            <a:r>
+              <a:t>4 → 7. Выручка под риском: 5,80 → 7,72 €. Категории клиентов при этом не сдвинулись —</a:t>
+            </a:r>
+          </a:p>
+          <a:p>
+            <a:r>
+              <a:t>это тоже честный результат, и его стоит показать.</a:t>
             </a:r>
           </a:p>
           <a:p>
@@ -1608,12 +1626,17 @@
           </a:p>
           <a:p>
             <a:r>
-              <a:t>обновляется на месте, без перезагрузки: 2 → 3 высокого, 4 → 3 среднего, 5,74 → 7,48 €,</a:t>
-            </a:r>
-          </a:p>
-          <a:p>
-            <a:r>
-              <a:t>сумма весов 15,0 → 21,0. Затем открыть карточку клиента #10 (балл 81,0) и вернуться</a:t>
+              <a:t>обновляется на месте, без перезагрузки: услуг высокого риска 4 → 7, выручка</a:t>
+            </a:r>
+          </a:p>
+          <a:p>
+            <a:r>
+              <a:t>под риском 5,80 → 7,72 €, сумма весов 13,0 → 19,0. Затем открыть карточку клиента #10</a:t>
+            </a:r>
+          </a:p>
+          <a:p>
+            <a:r>
+              <a:t>(балл 81,8) и вернуться</a:t>
             </a:r>
           </a:p>
           <a:p>
@@ -8739,7 +8762,7 @@
                 <a:cs typeface="Manrope"/>
                 <a:ea typeface="Manrope"/>
               </a:rPr>
-              <a:t>неуспешные продления</a:t>
+              <a:t>услуга приостановлена</a:t>
             </a:r>
           </a:p>
         </p:txBody>
@@ -8877,7 +8900,7 @@
                 <a:cs typeface="Manrope"/>
                 <a:ea typeface="Manrope"/>
               </a:rPr>
-              <a:t>услуга приостановлена</a:t>
+              <a:t>ожидание продления</a:t>
             </a:r>
           </a:p>
         </p:txBody>
@@ -9916,7 +9939,7 @@
         <p:spPr>
           <a:xfrm>
             <a:off x="626364" y="3012948"/>
-            <a:ext cx="6556248" cy="2418059"/>
+            <a:ext cx="6556248" cy="2713637"/>
           </a:xfrm>
           <a:prstGeom prst="rect">
             <a:avLst/>
@@ -9970,7 +9993,7 @@
         <p:spPr>
           <a:xfrm>
             <a:off x="658368" y="3044952"/>
-            <a:ext cx="6487678" cy="2354051"/>
+            <a:ext cx="6492240" cy="2649629"/>
           </a:xfrm>
           <a:prstGeom prst="rect">
             <a:avLst/>
@@ -9985,7 +10008,7 @@
         </p:nvSpPr>
         <p:spPr>
           <a:xfrm>
-            <a:off x="658368" y="5508731"/>
+            <a:off x="658368" y="5804309"/>
             <a:ext cx="6492240" cy="180848"/>
           </a:xfrm>
           <a:prstGeom prst="rect">
@@ -10080,7 +10103,7 @@
         <p:spPr>
           <a:xfrm>
             <a:off x="7392924" y="3012948"/>
-            <a:ext cx="4172407" cy="1346239"/>
+            <a:ext cx="4172407" cy="1350834"/>
           </a:xfrm>
           <a:prstGeom prst="rect">
             <a:avLst/>
@@ -10134,7 +10157,7 @@
         <p:spPr>
           <a:xfrm>
             <a:off x="7424928" y="3044952"/>
-            <a:ext cx="4093728" cy="1282231"/>
+            <a:ext cx="4108399" cy="1286826"/>
           </a:xfrm>
           <a:prstGeom prst="rect">
             <a:avLst/>
@@ -10149,8 +10172,8 @@
         </p:nvSpPr>
         <p:spPr>
           <a:xfrm>
-            <a:off x="7392924" y="4496347"/>
-            <a:ext cx="4172407" cy="1297724"/>
+            <a:off x="7392924" y="4500942"/>
+            <a:ext cx="4172407" cy="1173747"/>
           </a:xfrm>
           <a:prstGeom prst="rect">
             <a:avLst/>
@@ -10203,8 +10226,8 @@
         </p:blipFill>
         <p:spPr>
           <a:xfrm>
-            <a:off x="7424928" y="4528351"/>
-            <a:ext cx="4101909" cy="1233716"/>
+            <a:off x="7424928" y="4532946"/>
+            <a:ext cx="4108399" cy="1109739"/>
           </a:xfrm>
           <a:prstGeom prst="rect">
             <a:avLst/>
@@ -10219,7 +10242,7 @@
         </p:nvSpPr>
         <p:spPr>
           <a:xfrm>
-            <a:off x="7424928" y="5871795"/>
+            <a:off x="7424928" y="5752413"/>
             <a:ext cx="4108399" cy="343408"/>
           </a:xfrm>
           <a:prstGeom prst="rect">
@@ -10433,7 +10456,7 @@
                 <a:cs typeface="Manrope"/>
                 <a:ea typeface="Manrope"/>
               </a:rPr>
-              <a:t>Клиент #10 — высокий риск, 73,3 из 100</a:t>
+              <a:t>Клиент #10 — высокий риск, 71,4 из 100</a:t>
             </a:r>
           </a:p>
         </p:txBody>
@@ -10480,7 +10503,7 @@
                 <a:cs typeface="Manrope"/>
                 <a:ea typeface="Manrope"/>
               </a:rPr>
-              <a:t>Верхняя строка списка, отсортированного по риску по убыванию. Слева — реальные поля снимка, справа — тот же</a:t>
+              <a:t>Список отсортирован по риску по убыванию. Балл 71,4 делят клиенты #5 и #10 — берём #10, он выше по номеру.</a:t>
             </a:r>
           </a:p>
           <a:p>
@@ -10504,7 +10527,7 @@
                 <a:cs typeface="Manrope"/>
                 <a:ea typeface="Manrope"/>
               </a:rPr>
-              <a:t>клиент в интерфейсе.</a:t>
+              <a:t>Слева — реальные поля снимка, справа — тот же клиент в интерфейсе.</a:t>
             </a:r>
           </a:p>
         </p:txBody>
@@ -10805,7 +10828,7 @@
                 <a:cs typeface="Manrope SemiBold"/>
                 <a:ea typeface="Manrope SemiBold"/>
               </a:rPr>
-              <a:t>73,3 / 100</a:t>
+              <a:t>71,4 / 100</a:t>
             </a:r>
           </a:p>
         </p:txBody>
@@ -10993,7 +11016,7 @@
                 <a:cs typeface="Manrope Medium"/>
                 <a:ea typeface="Manrope Medium"/>
               </a:rPr>
-              <a:t>1 из 3</a:t>
+              <a:t>2 из 3</a:t>
             </a:r>
           </a:p>
         </p:txBody>
@@ -11242,7 +11265,7 @@
         <p:spPr>
           <a:xfrm>
             <a:off x="4759452" y="2263140"/>
-            <a:ext cx="6805879" cy="410011"/>
+            <a:ext cx="6805879" cy="413652"/>
           </a:xfrm>
           <a:prstGeom prst="rect">
             <a:avLst/>
@@ -11296,7 +11319,7 @@
         <p:spPr>
           <a:xfrm>
             <a:off x="4791456" y="2295144"/>
-            <a:ext cx="6671647" cy="346003"/>
+            <a:ext cx="6741871" cy="349644"/>
           </a:xfrm>
           <a:prstGeom prst="rect">
             <a:avLst/>
@@ -11311,8 +11334,8 @@
         </p:nvSpPr>
         <p:spPr>
           <a:xfrm>
-            <a:off x="4759452" y="2718871"/>
-            <a:ext cx="3361791" cy="1250858"/>
+            <a:off x="4759452" y="2722512"/>
+            <a:ext cx="3361791" cy="1268967"/>
           </a:xfrm>
           <a:prstGeom prst="rect">
             <a:avLst/>
@@ -11365,8 +11388,8 @@
         </p:blipFill>
         <p:spPr>
           <a:xfrm>
-            <a:off x="4791456" y="2750875"/>
-            <a:ext cx="3297783" cy="1186839"/>
+            <a:off x="4791456" y="2754516"/>
+            <a:ext cx="3297783" cy="1204959"/>
           </a:xfrm>
           <a:prstGeom prst="rect">
             <a:avLst/>
@@ -11381,8 +11404,8 @@
         </p:nvSpPr>
         <p:spPr>
           <a:xfrm>
-            <a:off x="8203539" y="2718871"/>
-            <a:ext cx="3361791" cy="1250858"/>
+            <a:off x="8203539" y="2722512"/>
+            <a:ext cx="3361791" cy="1268967"/>
           </a:xfrm>
           <a:prstGeom prst="rect">
             <a:avLst/>
@@ -11435,8 +11458,8 @@
         </p:blipFill>
         <p:spPr>
           <a:xfrm>
-            <a:off x="8235543" y="2750875"/>
-            <a:ext cx="3297783" cy="1186839"/>
+            <a:off x="8235543" y="2754516"/>
+            <a:ext cx="3297783" cy="1204959"/>
           </a:xfrm>
           <a:prstGeom prst="rect">
             <a:avLst/>
@@ -11451,7 +11474,7 @@
         </p:nvSpPr>
         <p:spPr>
           <a:xfrm>
-            <a:off x="4791456" y="4175469"/>
+            <a:off x="4791456" y="4197219"/>
             <a:ext cx="6741871" cy="151003"/>
           </a:xfrm>
           <a:prstGeom prst="rect">
@@ -11498,8 +11521,8 @@
         </p:nvSpPr>
         <p:spPr>
           <a:xfrm>
-            <a:off x="4759452" y="4390353"/>
-            <a:ext cx="6805879" cy="1513779"/>
+            <a:off x="4759452" y="4412103"/>
+            <a:ext cx="6805879" cy="1355554"/>
           </a:xfrm>
           <a:prstGeom prst="rect">
             <a:avLst/>
@@ -11552,8 +11575,8 @@
         </p:blipFill>
         <p:spPr>
           <a:xfrm>
-            <a:off x="4791456" y="4422357"/>
-            <a:ext cx="6697172" cy="1449771"/>
+            <a:off x="4791456" y="4444107"/>
+            <a:ext cx="6741871" cy="1291546"/>
           </a:xfrm>
           <a:prstGeom prst="rect">
             <a:avLst/>
@@ -11568,7 +11591,7 @@
         </p:nvSpPr>
         <p:spPr>
           <a:xfrm>
-            <a:off x="4791456" y="5981856"/>
+            <a:off x="4791456" y="5845381"/>
             <a:ext cx="6741871" cy="364998"/>
           </a:xfrm>
           <a:prstGeom prst="rect">
@@ -11602,7 +11625,7 @@
                 <a:cs typeface="Manrope"/>
                 <a:ea typeface="Manrope"/>
               </a:rPr>
-              <a:t>Почему именно этот клиент: максимальный балл в списке, услуга просрочена на 35 дней, 2 из 2 продлений не</a:t>
+              <a:t>Почему именно этот клиент: максимальный балл в списке, услуга просрочена на 35 дней, ожидает продления,</a:t>
             </a:r>
           </a:p>
           <a:p>
@@ -11626,7 +11649,7 @@
                 <a:cs typeface="Manrope"/>
                 <a:ea typeface="Manrope"/>
               </a:rPr>
-              <a:t>выполнены, автопродление отключено.</a:t>
+              <a:t>автопродление отключено.</a:t>
             </a:r>
           </a:p>
         </p:txBody>
@@ -11920,7 +11943,7 @@
                 <a:cs typeface="Manrope"/>
                 <a:ea typeface="Manrope"/>
               </a:rPr>
-              <a:t>Формула: 100 × Σ(вес × значение) / Σвес. По service-0030 сумма вкладов 11,00 при сумме весов 15,0 → 73,3. Ниже — фактические</a:t>
+              <a:t>Формула: 100 × Σ(вес × значение) / Σвес. По service-0030 сумма вкладов 7,50 при сумме весов 10,5 → 71,4. Ниже — фактические</a:t>
             </a:r>
           </a:p>
           <a:p>
@@ -12037,7 +12060,7 @@
                 <a:cs typeface="Manrope SemiBold"/>
                 <a:ea typeface="Manrope SemiBold"/>
               </a:rPr>
-              <a:t>Вклад факторов в балл 73,3 · service-0030</a:t>
+              <a:t>Вклад факторов в балл 71,4 · service-0030</a:t>
             </a:r>
           </a:p>
         </p:txBody>
@@ -12052,7 +12075,7 @@
         </p:nvGraphicFramePr>
         <p:xfrm>
           <a:off x="822960" y="2571496"/>
-          <a:ext cx="5660136" cy="3280664"/>
+          <a:ext cx="5660136" cy="2933192"/>
         </p:xfrm>
         <a:graphic>
           <a:graphicData uri="http://schemas.openxmlformats.org/drawingml/2006/chart">
@@ -12062,7 +12085,78 @@
       </p:graphicFrame>
       <p:sp>
         <p:nvSpPr>
-          <p:cNvPr id="9" name="Rectangle 8"/>
+          <p:cNvPr id="9" name="TextBox 8"/>
+          <p:cNvSpPr txBox="1"/>
+          <p:nvPr/>
+        </p:nvSpPr>
+        <p:spPr>
+          <a:xfrm>
+            <a:off x="877824" y="5577840"/>
+            <a:ext cx="5550408" cy="297180"/>
+          </a:xfrm>
+          <a:prstGeom prst="rect">
+            <a:avLst/>
+          </a:prstGeom>
+          <a:noFill/>
+        </p:spPr>
+        <p:txBody>
+          <a:bodyPr wrap="square" anchor="t" lIns="0" rIns="0" tIns="0" bIns="0">
+            <a:spAutoFit/>
+          </a:bodyPr>
+          <a:lstStyle/>
+          <a:p>
+            <a:pPr algn="l">
+              <a:lnSpc>
+                <a:spcPct val="122000"/>
+              </a:lnSpc>
+              <a:spcBef>
+                <a:spcPts val="0"/>
+              </a:spcBef>
+              <a:spcAft>
+                <a:spcPts val="0"/>
+              </a:spcAft>
+            </a:pPr>
+            <a:r>
+              <a:rPr sz="900" b="0" i="0">
+                <a:solidFill>
+                  <a:srgbClr val="666666"/>
+                </a:solidFill>
+                <a:latin typeface="Manrope"/>
+                <a:cs typeface="Manrope"/>
+                <a:ea typeface="Manrope"/>
+              </a:rPr>
+              <a:t>Не показаны: доля неуспешных продлений и число неуспешных продлений — за 90 дней попыток не</a:t>
+            </a:r>
+          </a:p>
+          <a:p>
+            <a:pPr algn="l">
+              <a:lnSpc>
+                <a:spcPct val="122000"/>
+              </a:lnSpc>
+              <a:spcBef>
+                <a:spcPts val="0"/>
+              </a:spcBef>
+              <a:spcAft>
+                <a:spcPts val="0"/>
+              </a:spcAft>
+            </a:pPr>
+            <a:r>
+              <a:rPr sz="900" b="0" i="0">
+                <a:solidFill>
+                  <a:srgbClr val="666666"/>
+                </a:solidFill>
+                <a:latin typeface="Manrope"/>
+                <a:cs typeface="Manrope"/>
+                <a:ea typeface="Manrope"/>
+              </a:rPr>
+              <a:t>было, фактор не определён и в знаменатель не входит.</a:t>
+            </a:r>
+          </a:p>
+        </p:txBody>
+      </p:sp>
+      <p:sp>
+        <p:nvSpPr>
+          <p:cNvPr id="10" name="Rectangle 9"/>
           <p:cNvSpPr/>
           <p:nvPr/>
         </p:nvSpPr>
@@ -12108,7 +12202,7 @@
       </p:sp>
       <p:sp>
         <p:nvSpPr>
-          <p:cNvPr id="10" name="Rectangle 9"/>
+          <p:cNvPr id="11" name="Rectangle 10"/>
           <p:cNvSpPr/>
           <p:nvPr/>
         </p:nvSpPr>
@@ -12152,7 +12246,7 @@
       </p:sp>
       <p:sp>
         <p:nvSpPr>
-          <p:cNvPr id="11" name="TextBox 10"/>
+          <p:cNvPr id="12" name="TextBox 11"/>
           <p:cNvSpPr txBox="1"/>
           <p:nvPr/>
         </p:nvSpPr>
@@ -12199,7 +12293,7 @@
       </p:sp>
       <p:sp>
         <p:nvSpPr>
-          <p:cNvPr id="12" name="TextBox 11"/>
+          <p:cNvPr id="13" name="TextBox 12"/>
           <p:cNvSpPr txBox="1"/>
           <p:nvPr/>
         </p:nvSpPr>
@@ -12239,7 +12333,7 @@
                 <a:cs typeface="Manrope"/>
                 <a:ea typeface="Manrope"/>
               </a:rPr>
-              <a:t>Данные снимка: expiresAt 14.09.2026, autoProlong = false, 2</a:t>
+              <a:t>Данные снимка: услуга истекла 35 дней назад, autoProlong = false,</a:t>
             </a:r>
           </a:p>
           <a:p>
@@ -12263,14 +12357,14 @@
                 <a:cs typeface="Manrope"/>
                 <a:ea typeface="Manrope"/>
               </a:rPr>
-              <a:t>продления из 2 со статусом not_performed.</a:t>
-            </a:r>
-          </a:p>
-        </p:txBody>
-      </p:sp>
-      <p:sp>
-        <p:nvSpPr>
-          <p:cNvPr id="13" name="Rectangle 12"/>
+              <a:t>статус prolong_wait.</a:t>
+            </a:r>
+          </a:p>
+        </p:txBody>
+      </p:sp>
+      <p:sp>
+        <p:nvSpPr>
+          <p:cNvPr id="14" name="Rectangle 13"/>
           <p:cNvSpPr/>
           <p:nvPr/>
         </p:nvSpPr>
@@ -12316,7 +12410,7 @@
       </p:sp>
       <p:sp>
         <p:nvSpPr>
-          <p:cNvPr id="14" name="Rectangle 13"/>
+          <p:cNvPr id="15" name="Rectangle 14"/>
           <p:cNvSpPr/>
           <p:nvPr/>
         </p:nvSpPr>
@@ -12360,7 +12454,7 @@
       </p:sp>
       <p:sp>
         <p:nvSpPr>
-          <p:cNvPr id="15" name="TextBox 14"/>
+          <p:cNvPr id="16" name="TextBox 15"/>
           <p:cNvSpPr txBox="1"/>
           <p:nvPr/>
         </p:nvSpPr>
@@ -12407,7 +12501,7 @@
       </p:sp>
       <p:sp>
         <p:nvSpPr>
-          <p:cNvPr id="16" name="TextBox 15"/>
+          <p:cNvPr id="17" name="TextBox 16"/>
           <p:cNvSpPr txBox="1"/>
           <p:nvPr/>
         </p:nvSpPr>
@@ -12447,7 +12541,7 @@
                 <a:cs typeface="Manrope"/>
                 <a:ea typeface="Manrope"/>
               </a:rPr>
-              <a:t>Услуга просрочена, продление не завершено, решение о продлении</a:t>
+              <a:t>Услуга просрочена и ждёт продления, а решение о продлении</a:t>
             </a:r>
           </a:p>
           <a:p>
@@ -12471,14 +12565,14 @@
                 <a:cs typeface="Manrope"/>
                 <a:ea typeface="Manrope"/>
               </a:rPr>
-              <a:t>зависит от клиента.</a:t>
-            </a:r>
-          </a:p>
-        </p:txBody>
-      </p:sp>
-      <p:sp>
-        <p:nvSpPr>
-          <p:cNvPr id="17" name="Rectangle 16"/>
+              <a:t>зависит от клиента, потому что автопродление выключено.</a:t>
+            </a:r>
+          </a:p>
+        </p:txBody>
+      </p:sp>
+      <p:sp>
+        <p:nvSpPr>
+          <p:cNvPr id="18" name="Rectangle 17"/>
           <p:cNvSpPr/>
           <p:nvPr/>
         </p:nvSpPr>
@@ -12524,7 +12618,7 @@
       </p:sp>
       <p:sp>
         <p:nvSpPr>
-          <p:cNvPr id="18" name="Rectangle 17"/>
+          <p:cNvPr id="19" name="Rectangle 18"/>
           <p:cNvSpPr/>
           <p:nvPr/>
         </p:nvSpPr>
@@ -12568,7 +12662,7 @@
       </p:sp>
       <p:sp>
         <p:nvSpPr>
-          <p:cNvPr id="19" name="TextBox 18"/>
+          <p:cNvPr id="20" name="TextBox 19"/>
           <p:cNvSpPr txBox="1"/>
           <p:nvPr/>
         </p:nvSpPr>
@@ -12615,14 +12709,14 @@
       </p:sp>
       <p:sp>
         <p:nvSpPr>
-          <p:cNvPr id="20" name="TextBox 19"/>
+          <p:cNvPr id="21" name="TextBox 20"/>
           <p:cNvSpPr txBox="1"/>
           <p:nvPr/>
         </p:nvSpPr>
         <p:spPr>
           <a:xfrm>
             <a:off x="7123176" y="5200564"/>
-            <a:ext cx="4208983" cy="505968"/>
+            <a:ext cx="4208983" cy="668528"/>
           </a:xfrm>
           <a:prstGeom prst="rect">
             <a:avLst/>
@@ -12655,7 +12749,7 @@
                 <a:cs typeface="Manrope"/>
                 <a:ea typeface="Manrope"/>
               </a:rPr>
-              <a:t>Три крупнейших фактора дают 3,0 + 2,5 + 2,0 = 7,5 из 15,0. С</a:t>
+              <a:t>Три сработавших фактора дают 3,0 + 2,5 + 2,0 = 7,5. Остальные</a:t>
             </a:r>
           </a:p>
           <a:p>
@@ -12679,7 +12773,7 @@
                 <a:cs typeface="Manrope"/>
                 <a:ea typeface="Manrope"/>
               </a:rPr>
-              <a:t>неуспешными продлениями и их долей (2,0 + 1,5) сумма вкладов 11,0</a:t>
+              <a:t>четыре либо равны нулю, либо не определены (нет попыток</a:t>
             </a:r>
           </a:p>
           <a:p>
@@ -12703,14 +12797,38 @@
                 <a:cs typeface="Manrope"/>
                 <a:ea typeface="Manrope"/>
               </a:rPr>
-              <a:t>из 15,0 — отсюда 73,3, выше порога 65.</a:t>
-            </a:r>
-          </a:p>
-        </p:txBody>
-      </p:sp>
-      <p:sp>
-        <p:nvSpPr>
-          <p:cNvPr id="21" name="Rectangle 20"/>
+              <a:t>продления за 90 дней) и в знаменатель не входят: 100 × 7,5 / 10,5 =</a:t>
+            </a:r>
+          </a:p>
+          <a:p>
+            <a:pPr algn="l">
+              <a:lnSpc>
+                <a:spcPct val="128000"/>
+              </a:lnSpc>
+              <a:spcBef>
+                <a:spcPts val="0"/>
+              </a:spcBef>
+              <a:spcAft>
+                <a:spcPts val="0"/>
+              </a:spcAft>
+            </a:pPr>
+            <a:r>
+              <a:rPr sz="1000" b="0" i="0">
+                <a:solidFill>
+                  <a:srgbClr val="666666"/>
+                </a:solidFill>
+                <a:latin typeface="Manrope"/>
+                <a:cs typeface="Manrope"/>
+                <a:ea typeface="Manrope"/>
+              </a:rPr>
+              <a:t>71,4 — выше порога 65.</a:t>
+            </a:r>
+          </a:p>
+        </p:txBody>
+      </p:sp>
+      <p:sp>
+        <p:nvSpPr>
+          <p:cNvPr id="22" name="Rectangle 21"/>
           <p:cNvSpPr/>
           <p:nvPr/>
         </p:nvSpPr>
@@ -12754,7 +12872,7 @@
       </p:sp>
       <p:sp>
         <p:nvSpPr>
-          <p:cNvPr id="22" name="TextBox 21"/>
+          <p:cNvPr id="23" name="TextBox 22"/>
           <p:cNvSpPr txBox="1"/>
           <p:nvPr/>
         </p:nvSpPr>
@@ -13405,7 +13523,7 @@
                 <a:cs typeface="Manrope SemiBold"/>
                 <a:ea typeface="Manrope SemiBold"/>
               </a:rPr>
-              <a:t>73,3 / 100</a:t>
+              <a:t>71,4 / 100</a:t>
             </a:r>
           </a:p>
         </p:txBody>
@@ -13842,7 +13960,7 @@
         <p:spPr>
           <a:xfrm>
             <a:off x="4878323" y="3323844"/>
-            <a:ext cx="6687008" cy="1462829"/>
+            <a:ext cx="6687008" cy="1948137"/>
           </a:xfrm>
           <a:prstGeom prst="rect">
             <a:avLst/>
@@ -13896,7 +14014,7 @@
         <p:spPr>
           <a:xfrm>
             <a:off x="4910327" y="3355848"/>
-            <a:ext cx="6615883" cy="1398821"/>
+            <a:ext cx="6623000" cy="1884129"/>
           </a:xfrm>
           <a:prstGeom prst="rect">
             <a:avLst/>
@@ -13911,8 +14029,8 @@
         </p:nvSpPr>
         <p:spPr>
           <a:xfrm>
-            <a:off x="4910327" y="4965192"/>
-            <a:ext cx="2134514" cy="1088136"/>
+            <a:off x="4910327" y="5477721"/>
+            <a:ext cx="2134514" cy="575607"/>
           </a:xfrm>
           <a:prstGeom prst="rect">
             <a:avLst/>
@@ -13957,7 +14075,7 @@
         </p:nvSpPr>
         <p:spPr>
           <a:xfrm>
-            <a:off x="5038343" y="5093208"/>
+            <a:off x="5038343" y="5605737"/>
             <a:ext cx="1878482" cy="130048"/>
           </a:xfrm>
           <a:prstGeom prst="rect">
@@ -14004,7 +14122,7 @@
         </p:nvSpPr>
         <p:spPr>
           <a:xfrm>
-            <a:off x="5038343" y="5330952"/>
+            <a:off x="5038343" y="5843481"/>
             <a:ext cx="1878482" cy="221487"/>
           </a:xfrm>
           <a:prstGeom prst="rect">
@@ -14038,7 +14156,7 @@
                 <a:cs typeface="Manrope"/>
                 <a:ea typeface="Manrope"/>
               </a:rPr>
-              <a:t>5,74 €</a:t>
+              <a:t>5,80 €</a:t>
             </a:r>
           </a:p>
         </p:txBody>
@@ -14051,7 +14169,7 @@
         </p:nvSpPr>
         <p:spPr>
           <a:xfrm>
-            <a:off x="5038343" y="5641848"/>
+            <a:off x="5038343" y="6154377"/>
             <a:ext cx="1878482" cy="142430"/>
           </a:xfrm>
           <a:prstGeom prst="rect">
@@ -14098,8 +14216,8 @@
         </p:nvSpPr>
         <p:spPr>
           <a:xfrm>
-            <a:off x="7154569" y="4965192"/>
-            <a:ext cx="2134514" cy="1088136"/>
+            <a:off x="7154569" y="5477721"/>
+            <a:ext cx="2134514" cy="575607"/>
           </a:xfrm>
           <a:prstGeom prst="rect">
             <a:avLst/>
@@ -14144,7 +14262,7 @@
         </p:nvSpPr>
         <p:spPr>
           <a:xfrm>
-            <a:off x="7282585" y="5093208"/>
+            <a:off x="7282585" y="5605737"/>
             <a:ext cx="1878482" cy="130048"/>
           </a:xfrm>
           <a:prstGeom prst="rect">
@@ -14191,7 +14309,7 @@
         </p:nvSpPr>
         <p:spPr>
           <a:xfrm>
-            <a:off x="7282585" y="5330952"/>
+            <a:off x="7282585" y="5843481"/>
             <a:ext cx="1878482" cy="221487"/>
           </a:xfrm>
           <a:prstGeom prst="rect">
@@ -14238,7 +14356,7 @@
         </p:nvSpPr>
         <p:spPr>
           <a:xfrm>
-            <a:off x="7282585" y="5641848"/>
+            <a:off x="7282585" y="6154377"/>
             <a:ext cx="1878482" cy="142430"/>
           </a:xfrm>
           <a:prstGeom prst="rect">
@@ -14285,8 +14403,8 @@
         </p:nvSpPr>
         <p:spPr>
           <a:xfrm>
-            <a:off x="9398811" y="4965192"/>
-            <a:ext cx="2134514" cy="1088136"/>
+            <a:off x="9398811" y="5477721"/>
+            <a:ext cx="2134514" cy="575607"/>
           </a:xfrm>
           <a:prstGeom prst="rect">
             <a:avLst/>
@@ -14331,7 +14449,7 @@
         </p:nvSpPr>
         <p:spPr>
           <a:xfrm>
-            <a:off x="9526827" y="5093208"/>
+            <a:off x="9526827" y="5605737"/>
             <a:ext cx="1878482" cy="130048"/>
           </a:xfrm>
           <a:prstGeom prst="rect">
@@ -14378,7 +14496,7 @@
         </p:nvSpPr>
         <p:spPr>
           <a:xfrm>
-            <a:off x="9526827" y="5330952"/>
+            <a:off x="9526827" y="5843481"/>
             <a:ext cx="1878482" cy="221487"/>
           </a:xfrm>
           <a:prstGeom prst="rect">
@@ -14425,7 +14543,7 @@
         </p:nvSpPr>
         <p:spPr>
           <a:xfrm>
-            <a:off x="9526827" y="5641848"/>
+            <a:off x="9526827" y="6154377"/>
             <a:ext cx="1878482" cy="142430"/>
           </a:xfrm>
           <a:prstGeom prst="rect">
@@ -14517,7 +14635,7 @@
         <p:spPr>
           <a:xfrm>
             <a:off x="658368" y="6355080"/>
-            <a:ext cx="10874959" cy="163067"/>
+            <a:ext cx="10874959" cy="307848"/>
           </a:xfrm>
           <a:prstGeom prst="rect">
             <a:avLst/>
@@ -14550,7 +14668,31 @@
                 <a:cs typeface="Manrope"/>
                 <a:ea typeface="Manrope"/>
               </a:rPr>
-              <a:t>Горизонт 30 дней. Сумма по четырём продлениям: 0,32 + 0,77 + 1,57 + 3,08 = 5,74 €. Оценка не является гарантированным прогнозом потерь.</a:t>
+              <a:t>Горизонт 30 дней. Четыре продления в горизонте стоят 0,95 + 2,34 + 5,47 + 8,27 = 17,03 €; из них под риском 0,36 + 0,70 + 1,81 + 2,93 = 5,80 €. Оценка не является гарантированным</a:t>
+            </a:r>
+          </a:p>
+          <a:p>
+            <a:pPr algn="l">
+              <a:lnSpc>
+                <a:spcPct val="120000"/>
+              </a:lnSpc>
+              <a:spcBef>
+                <a:spcPts val="0"/>
+              </a:spcBef>
+              <a:spcAft>
+                <a:spcPts val="0"/>
+              </a:spcAft>
+            </a:pPr>
+            <a:r>
+              <a:rPr sz="950" b="0" i="0">
+                <a:solidFill>
+                  <a:srgbClr val="666666"/>
+                </a:solidFill>
+                <a:latin typeface="Manrope"/>
+                <a:cs typeface="Manrope"/>
+                <a:ea typeface="Manrope"/>
+              </a:rPr>
+              <a:t>прогнозом потерь.</a:t>
             </a:r>
           </a:p>
         </p:txBody>
@@ -15033,7 +15175,7 @@
         <p:spPr>
           <a:xfrm>
             <a:off x="626364" y="2921508"/>
-            <a:ext cx="5346039" cy="1978550"/>
+            <a:ext cx="5346039" cy="531102"/>
           </a:xfrm>
           <a:prstGeom prst="rect">
             <a:avLst/>
@@ -15087,7 +15229,7 @@
         <p:spPr>
           <a:xfrm>
             <a:off x="658368" y="2953512"/>
-            <a:ext cx="5282031" cy="1900950"/>
+            <a:ext cx="5282031" cy="467094"/>
           </a:xfrm>
           <a:prstGeom prst="rect">
             <a:avLst/>
@@ -15103,7 +15245,7 @@
         <p:spPr>
           <a:xfrm>
             <a:off x="6219291" y="2921508"/>
-            <a:ext cx="5346039" cy="1978550"/>
+            <a:ext cx="5346039" cy="531102"/>
           </a:xfrm>
           <a:prstGeom prst="rect">
             <a:avLst/>
@@ -15157,7 +15299,7 @@
         <p:spPr>
           <a:xfrm>
             <a:off x="6251295" y="2953512"/>
-            <a:ext cx="5282031" cy="1900950"/>
+            <a:ext cx="3666512" cy="467094"/>
           </a:xfrm>
           <a:prstGeom prst="rect">
             <a:avLst/>
@@ -15299,7 +15441,7 @@
                 <a:cs typeface="Manrope Medium"/>
                 <a:ea typeface="Manrope Medium"/>
               </a:rPr>
-              <a:t>73,3</a:t>
+              <a:t>71,4</a:t>
             </a:r>
             <a:r>
               <a:rPr sz="1500" b="0">
@@ -15321,7 +15463,7 @@
                 <a:cs typeface="Manrope"/>
                 <a:ea typeface="Manrope"/>
               </a:rPr>
-              <a:t>81,0</a:t>
+              <a:t>81,8</a:t>
             </a:r>
           </a:p>
         </p:txBody>
@@ -15461,7 +15603,7 @@
                 <a:cs typeface="Manrope Medium"/>
                 <a:ea typeface="Manrope Medium"/>
               </a:rPr>
-              <a:t>73,3</a:t>
+              <a:t>71,4</a:t>
             </a:r>
             <a:r>
               <a:rPr sz="1500" b="0">
@@ -15483,7 +15625,7 @@
                 <a:cs typeface="Manrope"/>
                 <a:ea typeface="Manrope"/>
               </a:rPr>
-              <a:t>81,0</a:t>
+              <a:t>81,8</a:t>
             </a:r>
           </a:p>
         </p:txBody>
@@ -15576,7 +15718,7 @@
                 <a:cs typeface="Manrope SemiBold"/>
                 <a:ea typeface="Manrope SemiBold"/>
               </a:rPr>
-              <a:t>Клиентов высокого риска</a:t>
+              <a:t>Услуг высокого риска</a:t>
             </a:r>
           </a:p>
         </p:txBody>
@@ -15623,7 +15765,7 @@
                 <a:cs typeface="Manrope Medium"/>
                 <a:ea typeface="Manrope Medium"/>
               </a:rPr>
-              <a:t>2</a:t>
+              <a:t>4</a:t>
             </a:r>
             <a:r>
               <a:rPr sz="1500" b="0">
@@ -15645,7 +15787,7 @@
                 <a:cs typeface="Manrope"/>
                 <a:ea typeface="Manrope"/>
               </a:rPr>
-              <a:t>3</a:t>
+              <a:t>7</a:t>
             </a:r>
           </a:p>
         </p:txBody>
@@ -15738,7 +15880,7 @@
                 <a:cs typeface="Manrope SemiBold"/>
                 <a:ea typeface="Manrope SemiBold"/>
               </a:rPr>
-              <a:t>Клиентов среднего риска</a:t>
+              <a:t>Выручка под риском</a:t>
             </a:r>
           </a:p>
         </p:txBody>
@@ -15785,7 +15927,7 @@
                 <a:cs typeface="Manrope Medium"/>
                 <a:ea typeface="Manrope Medium"/>
               </a:rPr>
-              <a:t>4</a:t>
+              <a:t>5,80 €</a:t>
             </a:r>
             <a:r>
               <a:rPr sz="1500" b="0">
@@ -15807,7 +15949,7 @@
                 <a:cs typeface="Manrope"/>
                 <a:ea typeface="Manrope"/>
               </a:rPr>
-              <a:t>3</a:t>
+              <a:t>7,72 €</a:t>
             </a:r>
           </a:p>
         </p:txBody>
@@ -15900,7 +16042,7 @@
                 <a:cs typeface="Manrope SemiBold"/>
                 <a:ea typeface="Manrope SemiBold"/>
               </a:rPr>
-              <a:t>Выручка под риском</a:t>
+              <a:t>Сумма весов по услуге</a:t>
             </a:r>
           </a:p>
         </p:txBody>
@@ -15947,7 +16089,7 @@
                 <a:cs typeface="Manrope Medium"/>
                 <a:ea typeface="Manrope Medium"/>
               </a:rPr>
-              <a:t>5,74 €</a:t>
+              <a:t>10,5</a:t>
             </a:r>
             <a:r>
               <a:rPr sz="1500" b="0">
@@ -15969,7 +16111,7 @@
                 <a:cs typeface="Manrope"/>
                 <a:ea typeface="Manrope"/>
               </a:rPr>
-              <a:t>7,48 €</a:t>
+              <a:t>16,5</a:t>
             </a:r>
           </a:p>
         </p:txBody>
@@ -16062,7 +16204,7 @@
                 <a:cs typeface="Manrope SemiBold"/>
                 <a:ea typeface="Manrope SemiBold"/>
               </a:rPr>
-              <a:t>Сумма весов</a:t>
+              <a:t>Сумма весов модели</a:t>
             </a:r>
           </a:p>
         </p:txBody>
@@ -16109,7 +16251,7 @@
                 <a:cs typeface="Manrope Medium"/>
                 <a:ea typeface="Manrope Medium"/>
               </a:rPr>
-              <a:t>15,0</a:t>
+              <a:t>13,0</a:t>
             </a:r>
             <a:r>
               <a:rPr sz="1500" b="0">
@@ -16131,7 +16273,7 @@
                 <a:cs typeface="Manrope"/>
                 <a:ea typeface="Manrope"/>
               </a:rPr>
-              <a:t>21,0</a:t>
+              <a:t>19,0</a:t>
             </a:r>
           </a:p>
         </p:txBody>
@@ -16145,7 +16287,7 @@
         <p:spPr>
           <a:xfrm>
             <a:off x="658368" y="5641848"/>
-            <a:ext cx="10874959" cy="364998"/>
+            <a:ext cx="10874959" cy="538353"/>
           </a:xfrm>
           <a:prstGeom prst="rect">
             <a:avLst/>
@@ -16178,7 +16320,7 @@
                 <a:cs typeface="Manrope"/>
                 <a:ea typeface="Manrope"/>
               </a:rPr>
-              <a:t>Расчёт: сумма весов выросла с 15,0 до 21,0, вклад фактора — с 3,0 до 9,0, поэтому 100 × 17,0 / 21,0 = 81,0. Настройка сохраняется на сервере, сводка обновляется сразу, без</a:t>
+              <a:t>Расчёт: по service-0030 сумма весов выросла с 10,5 до 16,5, вклад фактора — с 3,0 до 9,0, поэтому 100 × 13,5 / 16,5 = 81,8. Категории клиентов (3 высокий / 3 средний) не сдвинулись:</a:t>
             </a:r>
           </a:p>
           <a:p>
@@ -16202,7 +16344,31 @@
                 <a:cs typeface="Manrope"/>
                 <a:ea typeface="Manrope"/>
               </a:rPr>
-              <a:t>перезагрузки страницы; кнопка «Значения по умолчанию» возвращает исходные 3,0 и прежние числа.</a:t>
+              <a:t>вес усилил сигналы, но не перевёл никого через порог. Настройка сохраняется на сервере, сводка обновляется сразу, без перезагрузки страницы; кнопка «Значения по</a:t>
+            </a:r>
+          </a:p>
+          <a:p>
+            <a:pPr algn="l">
+              <a:lnSpc>
+                <a:spcPct val="130000"/>
+              </a:lnSpc>
+              <a:spcBef>
+                <a:spcPts val="0"/>
+              </a:spcBef>
+              <a:spcAft>
+                <a:spcPts val="0"/>
+              </a:spcAft>
+            </a:pPr>
+            <a:r>
+              <a:rPr sz="1050" b="0" i="0">
+                <a:solidFill>
+                  <a:srgbClr val="666666"/>
+                </a:solidFill>
+                <a:latin typeface="Manrope"/>
+                <a:cs typeface="Manrope"/>
+                <a:ea typeface="Manrope"/>
+              </a:rPr>
+              <a:t>умолчанию» возвращает исходные 3,0 и прежние числа.</a:t>
             </a:r>
           </a:p>
         </p:txBody>

--- a/aeza_umirhack_defense.pptx
+++ b/aeza_umirhack_defense.pptx
@@ -147,58 +147,46 @@
           </c:spPr>
           <c:cat>
             <c:strRef>
-              <c:f>Sheet1!$A$2:$A$8</c:f>
+              <c:f>Sheet1!$A$2:$A$6</c:f>
               <c:strCache>
-                <c:ptCount val="7"/>
+                <c:ptCount val="5"/>
                 <c:pt idx="0">
                   <c:v>Близость даты окончания · 3,0</c:v>
                 </c:pt>
                 <c:pt idx="1">
+                  <c:v>Автопродление отключено · 2,0</c:v>
+                </c:pt>
+                <c:pt idx="2">
+                  <c:v>Недостаточно средств для продления · 2,0</c:v>
+                </c:pt>
+                <c:pt idx="3">
                   <c:v>Ожидание продления · 2,5</c:v>
                 </c:pt>
-                <c:pt idx="2">
-                  <c:v>Автопродление отключено · 2,0</c:v>
-                </c:pt>
-                <c:pt idx="3">
-                  <c:v>Неуспешные продления · 2,0</c:v>
-                </c:pt>
                 <c:pt idx="4">
-                  <c:v>Доля неуспешных продлений · 1,5</c:v>
-                </c:pt>
-                <c:pt idx="5">
-                  <c:v>Недостаточно средств · 2,0</c:v>
-                </c:pt>
-                <c:pt idx="6">
-                  <c:v>Услуга приостановлена · 2,0</c:v>
+                  <c:v>Услуга приостановлена · 1,0</c:v>
                 </c:pt>
               </c:strCache>
             </c:strRef>
           </c:cat>
           <c:val>
             <c:numRef>
-              <c:f>Sheet1!$B$2:$B$8</c:f>
+              <c:f>Sheet1!$B$2:$B$6</c:f>
               <c:numCache>
                 <c:formatCode>General</c:formatCode>
-                <c:ptCount val="7"/>
+                <c:ptCount val="5"/>
                 <c:pt idx="0">
                   <c:v>3.0</c:v>
                 </c:pt>
                 <c:pt idx="1">
+                  <c:v>2.0</c:v>
+                </c:pt>
+                <c:pt idx="2">
+                  <c:v>0.0</c:v>
+                </c:pt>
+                <c:pt idx="3">
                   <c:v>2.5</c:v>
                 </c:pt>
-                <c:pt idx="2">
-                  <c:v>2.0</c:v>
-                </c:pt>
-                <c:pt idx="3">
-                  <c:v>2.0</c:v>
-                </c:pt>
                 <c:pt idx="4">
-                  <c:v>1.5</c:v>
-                </c:pt>
-                <c:pt idx="5">
-                  <c:v>0.0</c:v>
-                </c:pt>
-                <c:pt idx="6">
                   <c:v>0.0</c:v>
                 </c:pt>
               </c:numCache>
@@ -1064,7 +1052,7 @@
           </a:p>
           <a:p>
             <a:r>
-              <a:t>строку user-0010@example.test — верхняя, балл 73,3), справа сводные метрики и блок</a:t>
+              <a:t>строку user-0010@example.test — верхняя, балл 71,4), справа сводные метрики и блок</a:t>
             </a:r>
           </a:p>
           <a:p>
@@ -1164,7 +1152,7 @@
           </a:p>
           <a:p>
             <a:r>
-              <a:t>клиент #10, балл 73,3 из 100, категория «высокий». Выбираем его не случайно —</a:t>
+              <a:t>клиент #10, балл 71,4 из 100, категория «высокий». Выбираем его не случайно —</a:t>
             </a:r>
           </a:p>
           <a:p>
@@ -1179,7 +1167,7 @@
           </a:p>
           <a:p>
             <a:r>
-              <a:t>баланс 203,79 €, всего пополнено 4 206,69 €. Выручка под риском — ноль,</a:t>
+              <a:t>баланс 203,79 €, всего пополнено 4 206,69 €. Выручка под риском — ноль,</a:t>
             </a:r>
           </a:p>
           <a:p>
@@ -1205,7 +1193,7 @@
           </a:p>
           <a:p>
             <a:r>
-              <a:t>Возможный вопрос: «Почему балл клиента 73,3, а не среднее по услугам?» —</a:t>
+              <a:t>Возможный вопрос: «Почему балл клиента 71,4, а не среднее по услугам?» —</a:t>
             </a:r>
           </a:p>
           <a:p>
@@ -1300,22 +1288,27 @@
           </a:p>
           <a:p>
             <a:r>
-              <a:t>сумму вес×значение, делить на сумму весов. По этой услуге сумма вкладов 11 из 15 —</a:t>
-            </a:r>
-          </a:p>
-          <a:p>
-            <a:r>
-              <a:t>отсюда 73,3.</a:t>
-            </a:r>
-          </a:p>
-          <a:p>
-            <a:r>
-              <a:t>Крупнейшие вклады: близость даты окончания — 3,0, ожидание продления — 2,5,</a:t>
-            </a:r>
-          </a:p>
-          <a:p>
-            <a:r>
-              <a:t>автопродление и неуспешные продления — по 2,0.</a:t>
+              <a:t>сумму вес×значение, делить на сумму весов. По этой услуге сумма вкладов</a:t>
+            </a:r>
+          </a:p>
+          <a:p>
+            <a:r>
+              <a:t>7,5 из 10,5 — отсюда 71,4.</a:t>
+            </a:r>
+          </a:p>
+          <a:p>
+            <a:r>
+              <a:t>Крупнейшие вклады: близость даты окончания — 3.0,</a:t>
+            </a:r>
+          </a:p>
+          <a:p>
+            <a:r>
+              <a:t>ожидание продления — 2.5,</a:t>
+            </a:r>
+          </a:p>
+          <a:p>
+            <a:r>
+              <a:t>автопродление отключено — 2.0.</a:t>
             </a:r>
           </a:p>
           <a:p>
@@ -1431,7 +1424,7 @@
           </a:p>
           <a:p>
             <a:r>
-              <a:t>«Здесь важно не сложить несопоставимое. У клиента #10 балл высокий — 73,3,</a:t>
+              <a:t>«Здесь важно не сложить несопоставимое. У клиента #10 балл высокий — 71,4,</a:t>
             </a:r>
           </a:p>
           <a:p>
@@ -1451,7 +1444,7 @@
           </a:p>
           <a:p>
             <a:r>
-              <a:t>Баланс 203,79 € и пополнения 4 206,69 € — это не потерянные деньги. Мы держим</a:t>
+              <a:t>Баланс 203,79 € и пополнения 4 206,69 € — это не потерянные деньги. Мы держим</a:t>
             </a:r>
           </a:p>
           <a:p>
@@ -1582,12 +1575,12 @@
           </a:p>
           <a:p>
             <a:r>
-              <a:t>Смотрите, что произошло. Балл клиента #10: 73,3 → 81,0. Клиентов высокого риска:</a:t>
-            </a:r>
-          </a:p>
-          <a:p>
-            <a:r>
-              <a:t>2 → 3, среднего: 4 → 3. Выручка под риском: 5,74 → 7,48 €.</a:t>
+              <a:t>Смотрите, что произошло. Балл клиента #10: 71,4 → 81,8. Клиентов высокого риска:</a:t>
+            </a:r>
+          </a:p>
+          <a:p>
+            <a:r>
+              <a:t>3 → 3, среднего: 3 → 3. Выручка под риском: 5,80 → 7,72 €.</a:t>
             </a:r>
           </a:p>
           <a:p>
@@ -1608,12 +1601,12 @@
           </a:p>
           <a:p>
             <a:r>
-              <a:t>обновляется на месте, без перезагрузки: 2 → 3 высокого, 4 → 3 среднего, 5,74 → 7,48 €,</a:t>
-            </a:r>
-          </a:p>
-          <a:p>
-            <a:r>
-              <a:t>сумма весов 15,0 → 21,0. Затем открыть карточку клиента #10 (балл 81,0) и вернуться</a:t>
+              <a:t>обновляется на месте, без перезагрузки: выручка 5,80 → 7,72 €,</a:t>
+            </a:r>
+          </a:p>
+          <a:p>
+            <a:r>
+              <a:t>сумма весов 13.0 → 19.0. Затем открыть карточку клиента #10 (балл 81,8) и вернуться</a:t>
             </a:r>
           </a:p>
           <a:p>
@@ -9970,7 +9963,7 @@
         <p:spPr>
           <a:xfrm>
             <a:off x="658368" y="3044952"/>
-            <a:ext cx="6487678" cy="2354051"/>
+            <a:ext cx="5537588" cy="2354051"/>
           </a:xfrm>
           <a:prstGeom prst="rect">
             <a:avLst/>
@@ -10134,7 +10127,7 @@
         <p:spPr>
           <a:xfrm>
             <a:off x="7424928" y="3044952"/>
-            <a:ext cx="4093728" cy="1282231"/>
+            <a:ext cx="4108399" cy="458069"/>
           </a:xfrm>
           <a:prstGeom prst="rect">
             <a:avLst/>
@@ -10204,7 +10197,7 @@
         <p:spPr>
           <a:xfrm>
             <a:off x="7424928" y="4528351"/>
-            <a:ext cx="4101909" cy="1233716"/>
+            <a:ext cx="4108399" cy="981577"/>
           </a:xfrm>
           <a:prstGeom prst="rect">
             <a:avLst/>
@@ -10433,7 +10426,7 @@
                 <a:cs typeface="Manrope"/>
                 <a:ea typeface="Manrope"/>
               </a:rPr>
-              <a:t>Клиент #10 — высокий риск, 73,3 из 100</a:t>
+              <a:t>Клиент #10 — высокий риск, 71,4 из 100</a:t>
             </a:r>
           </a:p>
         </p:txBody>
@@ -10805,7 +10798,7 @@
                 <a:cs typeface="Manrope SemiBold"/>
                 <a:ea typeface="Manrope SemiBold"/>
               </a:rPr>
-              <a:t>73,3 / 100</a:t>
+              <a:t>71,4 / 100</a:t>
             </a:r>
           </a:p>
         </p:txBody>
@@ -11296,7 +11289,7 @@
         <p:spPr>
           <a:xfrm>
             <a:off x="4791456" y="2295144"/>
-            <a:ext cx="6671647" cy="346003"/>
+            <a:ext cx="6405491" cy="346003"/>
           </a:xfrm>
           <a:prstGeom prst="rect">
             <a:avLst/>
@@ -11366,7 +11359,7 @@
         <p:spPr>
           <a:xfrm>
             <a:off x="4791456" y="2750875"/>
-            <a:ext cx="3297783" cy="1186839"/>
+            <a:ext cx="3114365" cy="1186850"/>
           </a:xfrm>
           <a:prstGeom prst="rect">
             <a:avLst/>
@@ -11436,7 +11429,7 @@
         <p:spPr>
           <a:xfrm>
             <a:off x="8235543" y="2750875"/>
-            <a:ext cx="3297783" cy="1186839"/>
+            <a:ext cx="3114365" cy="1186850"/>
           </a:xfrm>
           <a:prstGeom prst="rect">
             <a:avLst/>
@@ -11553,7 +11546,7 @@
         <p:spPr>
           <a:xfrm>
             <a:off x="4791456" y="4422357"/>
-            <a:ext cx="6697172" cy="1449771"/>
+            <a:ext cx="6741871" cy="631621"/>
           </a:xfrm>
           <a:prstGeom prst="rect">
             <a:avLst/>
@@ -11920,7 +11913,7 @@
                 <a:cs typeface="Manrope"/>
                 <a:ea typeface="Manrope"/>
               </a:rPr>
-              <a:t>Формула: 100 × Σ(вес × значение) / Σвес. По service-0030 сумма вкладов 11,00 при сумме весов 15,0 → 73,3. Ниже — фактические</a:t>
+              <a:t>Формула: 100 × Σ(вес × значение) / Σвес. По service-0030 балл 71,4 при сумме весов 13.0. Ниже — фактические вклады из</a:t>
             </a:r>
           </a:p>
           <a:p>
@@ -11944,7 +11937,7 @@
                 <a:cs typeface="Manrope"/>
                 <a:ea typeface="Manrope"/>
               </a:rPr>
-              <a:t>вклады из интерфейса.</a:t>
+              <a:t>интерфейса.</a:t>
             </a:r>
           </a:p>
         </p:txBody>
@@ -12037,7 +12030,7 @@
                 <a:cs typeface="Manrope SemiBold"/>
                 <a:ea typeface="Manrope SemiBold"/>
               </a:rPr>
-              <a:t>Вклад факторов в балл 73,3 · service-0030</a:t>
+              <a:t>Вклад факторов в балл 71,4 · service-0030</a:t>
             </a:r>
           </a:p>
         </p:txBody>
@@ -12622,7 +12615,7 @@
         <p:spPr>
           <a:xfrm>
             <a:off x="7123176" y="5200564"/>
-            <a:ext cx="4208983" cy="505968"/>
+            <a:ext cx="4208983" cy="343408"/>
           </a:xfrm>
           <a:prstGeom prst="rect">
             <a:avLst/>
@@ -12655,7 +12648,7 @@
                 <a:cs typeface="Manrope"/>
                 <a:ea typeface="Manrope"/>
               </a:rPr>
-              <a:t>Три крупнейших фактора дают 3,0 + 2,5 + 2,0 = 7,5 из 15,0. С</a:t>
+              <a:t>Три крупнейших фактора дают 3,0 + 2,5 + 2,0 = 7,5 из 10,5. Сумма</a:t>
             </a:r>
           </a:p>
           <a:p>
@@ -12679,31 +12672,7 @@
                 <a:cs typeface="Manrope"/>
                 <a:ea typeface="Manrope"/>
               </a:rPr>
-              <a:t>неуспешными продлениями и их долей (2,0 + 1,5) сумма вкладов 11,0</a:t>
-            </a:r>
-          </a:p>
-          <a:p>
-            <a:pPr algn="l">
-              <a:lnSpc>
-                <a:spcPct val="128000"/>
-              </a:lnSpc>
-              <a:spcBef>
-                <a:spcPts val="0"/>
-              </a:spcBef>
-              <a:spcAft>
-                <a:spcPts val="0"/>
-              </a:spcAft>
-            </a:pPr>
-            <a:r>
-              <a:rPr sz="1000" b="0" i="0">
-                <a:solidFill>
-                  <a:srgbClr val="666666"/>
-                </a:solidFill>
-                <a:latin typeface="Manrope"/>
-                <a:cs typeface="Manrope"/>
-                <a:ea typeface="Manrope"/>
-              </a:rPr>
-              <a:t>из 15,0 — отсюда 73,3, выше порога 65.</a:t>
+              <a:t>вкладов 7,5 из 10,5 — отсюда 71,4, выше порога 65.</a:t>
             </a:r>
           </a:p>
         </p:txBody>
@@ -13405,7 +13374,7 @@
                 <a:cs typeface="Manrope SemiBold"/>
                 <a:ea typeface="Manrope SemiBold"/>
               </a:rPr>
-              <a:t>73,3 / 100</a:t>
+              <a:t>71,4 / 100</a:t>
             </a:r>
           </a:p>
         </p:txBody>
@@ -13896,7 +13865,7 @@
         <p:spPr>
           <a:xfrm>
             <a:off x="4910327" y="3355848"/>
-            <a:ext cx="6615883" cy="1398821"/>
+            <a:ext cx="6255671" cy="1398821"/>
           </a:xfrm>
           <a:prstGeom prst="rect">
             <a:avLst/>
@@ -14038,7 +14007,7 @@
                 <a:cs typeface="Manrope"/>
                 <a:ea typeface="Manrope"/>
               </a:rPr>
-              <a:t>5,74 €</a:t>
+              <a:t>5,80 €</a:t>
             </a:r>
           </a:p>
         </p:txBody>
@@ -14412,7 +14381,7 @@
                 <a:cs typeface="Manrope"/>
                 <a:ea typeface="Manrope"/>
               </a:rPr>
-              <a:t>22 240,73 €</a:t>
+              <a:t>22 240,73 €</a:t>
             </a:r>
           </a:p>
         </p:txBody>
@@ -14550,7 +14519,7 @@
                 <a:cs typeface="Manrope"/>
                 <a:ea typeface="Manrope"/>
               </a:rPr>
-              <a:t>Горизонт 30 дней. Сумма по четырём продлениям: 0,32 + 0,77 + 1,57 + 3,08 = 5,74 €. Оценка не является гарантированным прогнозом потерь.</a:t>
+              <a:t>Горизонт 30 дней. Сумма по четырём продлениям: 0,32 + 0,77 + 1,57 + 3,08 = 5,80 €. Оценка не является гарантированным прогнозом потерь.</a:t>
             </a:r>
           </a:p>
         </p:txBody>
@@ -15087,7 +15056,7 @@
         <p:spPr>
           <a:xfrm>
             <a:off x="658368" y="2953512"/>
-            <a:ext cx="5282031" cy="1900950"/>
+            <a:ext cx="5282031" cy="486502"/>
           </a:xfrm>
           <a:prstGeom prst="rect">
             <a:avLst/>
@@ -15157,7 +15126,7 @@
         <p:spPr>
           <a:xfrm>
             <a:off x="6251295" y="2953512"/>
-            <a:ext cx="5282031" cy="1900950"/>
+            <a:ext cx="5282031" cy="486502"/>
           </a:xfrm>
           <a:prstGeom prst="rect">
             <a:avLst/>
@@ -15299,7 +15268,7 @@
                 <a:cs typeface="Manrope Medium"/>
                 <a:ea typeface="Manrope Medium"/>
               </a:rPr>
-              <a:t>73,3</a:t>
+              <a:t>71,4</a:t>
             </a:r>
             <a:r>
               <a:rPr sz="1500" b="0">
@@ -15321,7 +15290,7 @@
                 <a:cs typeface="Manrope"/>
                 <a:ea typeface="Manrope"/>
               </a:rPr>
-              <a:t>81,0</a:t>
+              <a:t>81,8</a:t>
             </a:r>
           </a:p>
         </p:txBody>
@@ -15461,7 +15430,7 @@
                 <a:cs typeface="Manrope Medium"/>
                 <a:ea typeface="Manrope Medium"/>
               </a:rPr>
-              <a:t>73,3</a:t>
+              <a:t>71,4</a:t>
             </a:r>
             <a:r>
               <a:rPr sz="1500" b="0">
@@ -15483,7 +15452,7 @@
                 <a:cs typeface="Manrope"/>
                 <a:ea typeface="Manrope"/>
               </a:rPr>
-              <a:t>81,0</a:t>
+              <a:t>81,8</a:t>
             </a:r>
           </a:p>
         </p:txBody>
@@ -15947,7 +15916,7 @@
                 <a:cs typeface="Manrope Medium"/>
                 <a:ea typeface="Manrope Medium"/>
               </a:rPr>
-              <a:t>5,74 €</a:t>
+              <a:t>5,80 €</a:t>
             </a:r>
             <a:r>
               <a:rPr sz="1500" b="0">
@@ -15969,7 +15938,7 @@
                 <a:cs typeface="Manrope"/>
                 <a:ea typeface="Manrope"/>
               </a:rPr>
-              <a:t>7,48 €</a:t>
+              <a:t>7,72 €</a:t>
             </a:r>
           </a:p>
         </p:txBody>
@@ -16109,7 +16078,7 @@
                 <a:cs typeface="Manrope Medium"/>
                 <a:ea typeface="Manrope Medium"/>
               </a:rPr>
-              <a:t>15,0</a:t>
+              <a:t>13.0</a:t>
             </a:r>
             <a:r>
               <a:rPr sz="1500" b="0">
@@ -16131,7 +16100,7 @@
                 <a:cs typeface="Manrope"/>
                 <a:ea typeface="Manrope"/>
               </a:rPr>
-              <a:t>21,0</a:t>
+              <a:t>19.0</a:t>
             </a:r>
           </a:p>
         </p:txBody>
@@ -16178,7 +16147,7 @@
                 <a:cs typeface="Manrope"/>
                 <a:ea typeface="Manrope"/>
               </a:rPr>
-              <a:t>Расчёт: сумма весов выросла с 15,0 до 21,0, вклад фактора — с 3,0 до 9,0, поэтому 100 × 17,0 / 21,0 = 81,0. Настройка сохраняется на сервере, сводка обновляется сразу, без</a:t>
+              <a:t>Расчёт: сумма весов выросла с 13.0 до 19.0, вклад фактора — с 3.0 до 9.0, поэтому балл service-0030 стал 81,8. Настройка сохраняется на сервере, сводка обновляется сразу, без</a:t>
             </a:r>
           </a:p>
           <a:p>

--- a/aeza_umirhack_defense.pptx
+++ b/aeza_umirhack_defense.pptx
@@ -14519,7 +14519,7 @@
                 <a:cs typeface="Manrope"/>
                 <a:ea typeface="Manrope"/>
               </a:rPr>
-              <a:t>Горизонт 30 дней. Сумма по четырём продлениям: 0,32 + 0,77 + 1,57 + 3,08 = 5,80 €. Оценка не является гарантированным прогнозом потерь.</a:t>
+              <a:t>Горизонт 30 дней. Сумма по 4 продлениям: 0,36 + 0,70 + 1,81 + 2,93 = 5,80 €. Оценка не является гарантированным прогнозом потерь.</a:t>
             </a:r>
           </a:p>
         </p:txBody>
